--- a/public/fun/pack/pptx/birthdaypro/돌잔치프리미엄_49_감사인사중심_스노우포레스트.pptx
+++ b/public/fun/pack/pptx/birthdaypro/돌잔치프리미엄_49_감사인사중심_스노우포레스트.pptx
@@ -112,12 +112,12 @@
   <p:extLst>
     <p:ext uri="{521415D9-36F7-43E2-AB2F-B90AF26B5E84}">
       <p14:sectionLst xmlns:p14="http://schemas.microsoft.com/office/powerpoint/2010/main">
-        <p14:section name="시작" id="{11C1BC70-98A2-43D2-A73A-AA565D746809}">
+        <p14:section name="시작" id="{B8F59FFB-2C48-45F0-9086-2CED23CA44C1}">
           <p14:sldIdLst>
             <p14:sldId id="256"/>
           </p14:sldIdLst>
         </p14:section>
-        <p14:section name="본문" id="{491E3231-8AA4-41BF-A13C-90FF9A8F381B}">
+        <p14:section name="본문" id="{DF1CB6F1-4B23-4E24-81F7-B286600B4224}">
           <p14:sldIdLst>
             <p14:sldId id="257"/>
             <p14:sldId id="258"/>
@@ -125,7 +125,7 @@
             <p14:sldId id="260"/>
           </p14:sldIdLst>
         </p14:section>
-        <p14:section name="마무리" id="{C1840C7A-AF92-4891-8BC7-9036B556E25E}">
+        <p14:section name="마무리" id="{77232A44-E712-463A-9328-C05540928929}">
           <p14:sldIdLst>
             <p14:sldId id="261"/>
           </p14:sldIdLst>
@@ -1489,7 +1489,7 @@
             </a:lvl1pPr>
           </a:lstStyle>
           <a:p>
-            <a:fld id="{4A171742-200F-4DB6-A280-CAD705B5B697}" type="slidenum">
+            <a:fld id="{D4E5F295-A968-4D10-9AF2-A1E61A210C44}" type="slidenum">
               <a:rPr lang="en-US"/>
               <a:t>‹#›</a:t>
             </a:fld>
@@ -2199,7 +2199,7 @@
             </a:lvl1pPr>
           </a:lstStyle>
           <a:p>
-            <a:fld id="{2A880B81-48AB-4884-A07E-2D846BDD4CB3}" type="slidenum">
+            <a:fld id="{98182F12-BA77-47B4-8E99-D3F307C411C0}" type="slidenum">
               <a:rPr lang="en-US"/>
               <a:t>‹#›</a:t>
             </a:fld>
@@ -2869,7 +2869,7 @@
             </a:lvl1pPr>
           </a:lstStyle>
           <a:p>
-            <a:fld id="{D60E6C12-1337-41D9-BEB1-8AFA7B223EDB}" type="slidenum">
+            <a:fld id="{AC7CBC8C-01DF-4CF5-993D-449C623D259B}" type="slidenum">
               <a:rPr lang="en-US"/>
               <a:t>‹#›</a:t>
             </a:fld>
@@ -3710,7 +3710,7 @@
           <a:p>
             <a:r>
               <a:rPr lang="ko-KR"/>
-              <a:t>새해 첫 돌, 복 나눠 드리겠습니다</a:t>
+              <a:t>첫 돌의 복을 나눠 드리겠습니다</a:t>
             </a:r>
           </a:p>
         </p:txBody>
@@ -3732,7 +3732,7 @@
           <a:p>
             <a:r>
               <a:rPr lang="ko-KR"/>
-              <a:t>아기 이름 · 0000. 00. 00</a:t>
+              <a:t>아기 이름 · 날짜 입력</a:t>
             </a:r>
           </a:p>
           <a:p>
@@ -3895,7 +3895,7 @@
           <a:bodyPr/>
           <a:lstStyle/>
           <a:p>
-            <a:fld id="{102774CE-4101-40F5-9667-6117EBCC45EE}" type="slidenum">
+            <a:fld id="{03EA0958-E84E-495D-81C4-AF21906B0E07}" type="slidenum">
               <a:rPr lang="en-US"/>
               <a:t>‹#›</a:t>
             </a:fld>
@@ -4495,7 +4495,7 @@
           <a:bodyPr/>
           <a:lstStyle/>
           <a:p>
-            <a:fld id="{365C5686-FCCA-4558-90BA-8B31F83031A6}" type="slidenum">
+            <a:fld id="{725B9ED5-93E0-4F1B-9618-EF889412BF62}" type="slidenum">
               <a:rPr lang="en-US"/>
               <a:t>‹#›</a:t>
             </a:fld>
@@ -4847,7 +4847,7 @@
           <a:bodyPr/>
           <a:lstStyle/>
           <a:p>
-            <a:fld id="{0A970622-084D-4385-B65D-076F06044B6A}" type="slidenum">
+            <a:fld id="{6E19C3E7-6F23-43CB-A748-9645CE77C79A}" type="slidenum">
               <a:rPr lang="en-US"/>
               <a:t>‹#›</a:t>
             </a:fld>
@@ -5727,7 +5727,7 @@
           <a:bodyPr/>
           <a:lstStyle/>
           <a:p>
-            <a:fld id="{7C359B21-BFA0-495F-95E5-D636D8C76593}" type="slidenum">
+            <a:fld id="{984E2E85-E946-46F5-BEA6-026D82AA2C90}" type="slidenum">
               <a:rPr lang="en-US"/>
               <a:t>‹#›</a:t>
             </a:fld>
